--- a/暑假專題成果.pptx
+++ b/暑假專題成果.pptx
@@ -1410,6 +1410,13 @@
           </a:solidFill>
           <a:ln/>
         </p:spPr>
+        <p:txBody>
+          <a:bodyPr/>
+          <a:lstStyle/>
+          <a:p>
+            <a:endParaRPr lang="zh-TW" altLang="en-US"/>
+          </a:p>
+        </p:txBody>
       </p:sp>
       <p:sp>
         <p:nvSpPr>
@@ -1430,6 +1437,13 @@
           </a:solidFill>
           <a:ln/>
         </p:spPr>
+        <p:txBody>
+          <a:bodyPr/>
+          <a:lstStyle/>
+          <a:p>
+            <a:endParaRPr lang="zh-TW" altLang="en-US"/>
+          </a:p>
+        </p:txBody>
       </p:sp>
       <p:pic>
         <p:nvPicPr>
@@ -1501,6 +1515,13 @@
           </a:solidFill>
           <a:ln/>
         </p:spPr>
+        <p:txBody>
+          <a:bodyPr/>
+          <a:lstStyle/>
+          <a:p>
+            <a:endParaRPr lang="zh-TW" altLang="en-US"/>
+          </a:p>
+        </p:txBody>
       </p:sp>
       <p:sp>
         <p:nvSpPr>
@@ -1521,6 +1542,13 @@
           </a:solidFill>
           <a:ln/>
         </p:spPr>
+        <p:txBody>
+          <a:bodyPr/>
+          <a:lstStyle/>
+          <a:p>
+            <a:endParaRPr lang="zh-TW" altLang="en-US"/>
+          </a:p>
+        </p:txBody>
       </p:sp>
       <p:pic>
         <p:nvPicPr>
@@ -1592,6 +1620,13 @@
           </a:solidFill>
           <a:ln/>
         </p:spPr>
+        <p:txBody>
+          <a:bodyPr/>
+          <a:lstStyle/>
+          <a:p>
+            <a:endParaRPr lang="zh-TW" altLang="en-US"/>
+          </a:p>
+        </p:txBody>
       </p:sp>
       <p:sp>
         <p:nvSpPr>
@@ -1612,6 +1647,13 @@
           </a:solidFill>
           <a:ln/>
         </p:spPr>
+        <p:txBody>
+          <a:bodyPr/>
+          <a:lstStyle/>
+          <a:p>
+            <a:endParaRPr lang="zh-TW" altLang="en-US"/>
+          </a:p>
+        </p:txBody>
       </p:sp>
       <p:pic>
         <p:nvPicPr>
@@ -1683,6 +1725,13 @@
           </a:solidFill>
           <a:ln/>
         </p:spPr>
+        <p:txBody>
+          <a:bodyPr/>
+          <a:lstStyle/>
+          <a:p>
+            <a:endParaRPr lang="zh-TW" altLang="en-US"/>
+          </a:p>
+        </p:txBody>
       </p:sp>
       <p:sp>
         <p:nvSpPr>
@@ -1703,6 +1752,13 @@
           </a:solidFill>
           <a:ln/>
         </p:spPr>
+        <p:txBody>
+          <a:bodyPr/>
+          <a:lstStyle/>
+          <a:p>
+            <a:endParaRPr lang="zh-TW" altLang="en-US"/>
+          </a:p>
+        </p:txBody>
       </p:sp>
       <p:pic>
         <p:nvPicPr>
@@ -1865,6 +1921,13 @@
           </a:solidFill>
           <a:ln/>
         </p:spPr>
+        <p:txBody>
+          <a:bodyPr/>
+          <a:lstStyle/>
+          <a:p>
+            <a:endParaRPr lang="zh-TW" altLang="en-US"/>
+          </a:p>
+        </p:txBody>
       </p:sp>
       <p:sp>
         <p:nvSpPr>
@@ -1885,6 +1948,13 @@
           </a:solidFill>
           <a:ln/>
         </p:spPr>
+        <p:txBody>
+          <a:bodyPr/>
+          <a:lstStyle/>
+          <a:p>
+            <a:endParaRPr lang="zh-TW" altLang="en-US"/>
+          </a:p>
+        </p:txBody>
       </p:sp>
       <p:pic>
         <p:nvPicPr>
@@ -1956,6 +2026,13 @@
           </a:solidFill>
           <a:ln/>
         </p:spPr>
+        <p:txBody>
+          <a:bodyPr/>
+          <a:lstStyle/>
+          <a:p>
+            <a:endParaRPr lang="zh-TW" altLang="en-US"/>
+          </a:p>
+        </p:txBody>
       </p:sp>
       <p:sp>
         <p:nvSpPr>
@@ -1976,6 +2053,13 @@
           </a:solidFill>
           <a:ln/>
         </p:spPr>
+        <p:txBody>
+          <a:bodyPr/>
+          <a:lstStyle/>
+          <a:p>
+            <a:endParaRPr lang="zh-TW" altLang="en-US"/>
+          </a:p>
+        </p:txBody>
       </p:sp>
       <p:pic>
         <p:nvPicPr>
@@ -2047,6 +2131,13 @@
           </a:solidFill>
           <a:ln/>
         </p:spPr>
+        <p:txBody>
+          <a:bodyPr/>
+          <a:lstStyle/>
+          <a:p>
+            <a:endParaRPr lang="zh-TW" altLang="en-US"/>
+          </a:p>
+        </p:txBody>
       </p:sp>
       <p:sp>
         <p:nvSpPr>
@@ -2067,6 +2158,13 @@
           </a:solidFill>
           <a:ln/>
         </p:spPr>
+        <p:txBody>
+          <a:bodyPr/>
+          <a:lstStyle/>
+          <a:p>
+            <a:endParaRPr lang="zh-TW" altLang="en-US"/>
+          </a:p>
+        </p:txBody>
       </p:sp>
       <p:pic>
         <p:nvPicPr>
@@ -2138,6 +2236,13 @@
           </a:solidFill>
           <a:ln/>
         </p:spPr>
+        <p:txBody>
+          <a:bodyPr/>
+          <a:lstStyle/>
+          <a:p>
+            <a:endParaRPr lang="zh-TW" altLang="en-US"/>
+          </a:p>
+        </p:txBody>
       </p:sp>
       <p:sp>
         <p:nvSpPr>
@@ -2158,6 +2263,13 @@
           </a:solidFill>
           <a:ln/>
         </p:spPr>
+        <p:txBody>
+          <a:bodyPr/>
+          <a:lstStyle/>
+          <a:p>
+            <a:endParaRPr lang="zh-TW" altLang="en-US"/>
+          </a:p>
+        </p:txBody>
       </p:sp>
       <p:pic>
         <p:nvPicPr>
@@ -2229,6 +2341,13 @@
           </a:solidFill>
           <a:ln/>
         </p:spPr>
+        <p:txBody>
+          <a:bodyPr/>
+          <a:lstStyle/>
+          <a:p>
+            <a:endParaRPr lang="zh-TW" altLang="en-US"/>
+          </a:p>
+        </p:txBody>
       </p:sp>
       <p:sp>
         <p:nvSpPr>
@@ -2249,6 +2368,13 @@
           </a:solidFill>
           <a:ln/>
         </p:spPr>
+        <p:txBody>
+          <a:bodyPr/>
+          <a:lstStyle/>
+          <a:p>
+            <a:endParaRPr lang="zh-TW" altLang="en-US"/>
+          </a:p>
+        </p:txBody>
       </p:sp>
       <p:pic>
         <p:nvPicPr>
@@ -2322,7 +2448,7 @@
     <p:sldLayoutId id="2147483658" r:id="rId10"/>
     <p:sldLayoutId id="2147483659" r:id="rId11"/>
   </p:sldLayoutIdLst>
-  <p:hf sldNum="0" hdr="0" ftr="0" dt="0"/>
+  <p:hf hdr="0" dt="0"/>
   <p:txStyles>
     <p:titleStyle>
       <a:lvl1pPr algn="ctr" defTabSz="914400" rtl="0" eaLnBrk="1" latinLnBrk="0" hangingPunct="1">
@@ -3801,17 +3927,11 @@
           <a:bodyPr wrap="none" lIns="0" tIns="0" rIns="0" bIns="0" rtlCol="0" anchor="t"/>
           <a:lstStyle/>
           <a:p>
-            <a:pPr marL="457200" indent="-457200" algn="l">
+            <a:pPr algn="l">
               <a:lnSpc>
                 <a:spcPts val="3300"/>
               </a:lnSpc>
-              <a:buFont typeface="Arial" panose="020B0604020202020204" pitchFamily="34" charset="0"/>
-              <a:buChar char="•"/>
             </a:pPr>
-            <a:r>
-              <a:rPr lang="zh-TW" altLang="en-US" sz="2650" dirty="0"/>
-              <a:t>情緒分類尚未完善，預計再一至二周</a:t>
-            </a:r>
             <a:endParaRPr lang="en-US" sz="2650" dirty="0"/>
           </a:p>
         </p:txBody>
@@ -8358,7 +8478,7 @@
                 <a:ea typeface="Lato" pitchFamily="34" charset="-122"/>
                 <a:cs typeface="Lato" pitchFamily="34" charset="-120"/>
               </a:rPr>
-              <a:t>將使用者對話進行情緒分類（焦慮、悲傷、憤怒、恐懼、厭惡、羞愧），並顯示各種情緒在過去對話中出現的比例</a:t>
+              <a:t>將使用者對話進行情緒分類（焦慮、悲傷、憤怒、恐懼、厭惡、羞愧、快樂、滿足、驚訝、興奮、冷靜、無法判斷），並顯示各種情緒在過去對話中出現的比例</a:t>
             </a:r>
             <a:endParaRPr lang="en-US" altLang="zh-TW" sz="1700" dirty="0">
               <a:solidFill>
@@ -10268,10 +10388,10 @@
       </p:sp>
       <p:pic>
         <p:nvPicPr>
-          <p:cNvPr id="24" name="圖片 23">
+          <p:cNvPr id="6" name="圖片 5" descr="一張含有 文字, 圖表, 寫生, 圖畫 的圖片&#10;&#10;AI 產生的內容可能不正確。">
             <a:extLst>
               <a:ext uri="{FF2B5EF4-FFF2-40B4-BE49-F238E27FC236}">
-                <a16:creationId xmlns:a16="http://schemas.microsoft.com/office/drawing/2014/main" id="{BD47C768-3ADA-D5B6-E583-E507EF15CDC5}"/>
+                <a16:creationId xmlns:a16="http://schemas.microsoft.com/office/drawing/2014/main" id="{9E7BF6D2-240A-5FFA-FBE6-AE623B4FF32C}"/>
               </a:ext>
             </a:extLst>
           </p:cNvPr>
@@ -10282,13 +10402,14 @@
         </p:nvPicPr>
         <p:blipFill>
           <a:blip r:embed="rId3"/>
-          <a:srcRect/>
-          <a:stretch/>
+          <a:stretch>
+            <a:fillRect/>
+          </a:stretch>
         </p:blipFill>
         <p:spPr>
           <a:xfrm>
-            <a:off x="4221990" y="260703"/>
-            <a:ext cx="6865110" cy="7708193"/>
+            <a:off x="2751947" y="160720"/>
+            <a:ext cx="9478154" cy="7783130"/>
           </a:xfrm>
           <a:prstGeom prst="rect">
             <a:avLst/>
@@ -10707,7 +10828,7 @@
                 <a:latin typeface="Lato" panose="020F0502020204030203" pitchFamily="34" charset="0"/>
                 <a:cs typeface="Lato" panose="020F0502020204030203" pitchFamily="34" charset="0"/>
               </a:rPr>
-              <a:t>藝文資源、學習資源、心理輔導資源、職涯發展、體育設施、餐飲資源、教官室、社團列  表、工讀獎助、租屋資訊、意見反映、校園動物陪伴、霸凌、性平申訴管道</a:t>
+              <a:t>藝文資源、學習資源、心理輔導資源、職涯發展、體育設施、餐飲資源、教官室、社團列表、工讀獎助、租屋資訊、意見反映、校園動物陪伴、霸凌、性平申訴管道</a:t>
             </a:r>
           </a:p>
           <a:p>
@@ -10788,22 +10909,25 @@
                 <a:latin typeface="Lato" panose="020F0502020204030203" pitchFamily="34" charset="0"/>
                 <a:cs typeface="Lato" panose="020F0502020204030203" pitchFamily="34" charset="0"/>
               </a:rPr>
-              <a:t>方法：將使用者對話進行情緒分類（憤怒、悲傷、焦慮</a:t>
-            </a:r>
-            <a:r>
-              <a:rPr lang="en-US" altLang="zh-TW" sz="1750" dirty="0">
-                <a:latin typeface="Lato" panose="020F0502020204030203" pitchFamily="34" charset="0"/>
-                <a:ea typeface="Lato" panose="020F0502020204030203" pitchFamily="34" charset="0"/>
-                <a:cs typeface="Lato" panose="020F0502020204030203" pitchFamily="34" charset="0"/>
+              <a:t>方法：將使用者對話進行情緒分類（</a:t>
+            </a:r>
+            <a:r>
+              <a:rPr lang="zh-TW" altLang="en-US" dirty="0">
+                <a:solidFill>
+                  <a:srgbClr val="4A4A45"/>
+                </a:solidFill>
+                <a:latin typeface="Lato" pitchFamily="34" charset="0"/>
+                <a:ea typeface="Lato" pitchFamily="34" charset="-122"/>
+                <a:cs typeface="Lato" pitchFamily="34" charset="-120"/>
               </a:rPr>
-              <a:t>…</a:t>
+              <a:t>焦慮、悲傷、憤怒、恐懼、厭惡、羞愧、快樂、滿足、驚訝、興奮、冷靜、無法判斷</a:t>
             </a:r>
             <a:r>
               <a:rPr lang="zh-TW" altLang="en-US" sz="1750" dirty="0">
                 <a:latin typeface="Lato" panose="020F0502020204030203" pitchFamily="34" charset="0"/>
                 <a:cs typeface="Lato" panose="020F0502020204030203" pitchFamily="34" charset="0"/>
               </a:rPr>
-              <a:t>），並顯示各種情緒在過去對話中出現的比例；同時提供 過去七天每日摘要，幫助使用者快速回顧心情與思緒。</a:t>
+              <a:t>），並顯示各種情緒在過去對話中出現的比例；同時提供過去七天每日摘要，幫助使用者快速回顧心情與思緒。</a:t>
             </a:r>
           </a:p>
           <a:p>
